--- a/m7/diapositivos/sessao-13-m7-f09.pptx
+++ b/m7/diapositivos/sessao-13-m7-f09.pptx
@@ -1910,7 +1910,75 @@
                 <a:ea typeface="Arial" pitchFamily="34" charset="-122"/>
                 <a:cs typeface="Arial" pitchFamily="34" charset="-120"/>
               </a:rPr>
-              <a:t>O mesmo desaparecimento em Alcácer Quibir (1578) dá tragédia em Frei Luís de Sousa e mito em Mensagem: um regresso que destrói e um que se espera.</a:t>
+              <a:t>O mesmo desaparecimento em Alcácer Quibir (1578) dá tragédia em </a:t>
+            </a:r>
+            <a:pPr indent="0" marL="0">
+              <a:lnSpc>
+                <a:spcPct val="105000"/>
+              </a:lnSpc>
+              <a:buNone/>
+            </a:pPr>
+            <a:r>
+              <a:rPr lang="en-US" sz="2200" i="1" dirty="0">
+                <a:solidFill>
+                  <a:srgbClr val="F2F0EA"/>
+                </a:solidFill>
+                <a:latin typeface="Arial" pitchFamily="34" charset="0"/>
+                <a:ea typeface="Arial" pitchFamily="34" charset="-122"/>
+                <a:cs typeface="Arial" pitchFamily="34" charset="-120"/>
+              </a:rPr>
+              <a:t>Frei Luís de Sousa</a:t>
+            </a:r>
+            <a:pPr indent="0" marL="0">
+              <a:lnSpc>
+                <a:spcPct val="105000"/>
+              </a:lnSpc>
+              <a:buNone/>
+            </a:pPr>
+            <a:r>
+              <a:rPr lang="en-US" sz="2200" dirty="0">
+                <a:solidFill>
+                  <a:srgbClr val="F2F0EA"/>
+                </a:solidFill>
+                <a:latin typeface="Arial" pitchFamily="34" charset="0"/>
+                <a:ea typeface="Arial" pitchFamily="34" charset="-122"/>
+                <a:cs typeface="Arial" pitchFamily="34" charset="-120"/>
+              </a:rPr>
+              <a:t> e mito em </a:t>
+            </a:r>
+            <a:pPr indent="0" marL="0">
+              <a:lnSpc>
+                <a:spcPct val="105000"/>
+              </a:lnSpc>
+              <a:buNone/>
+            </a:pPr>
+            <a:r>
+              <a:rPr lang="en-US" sz="2200" i="1" dirty="0">
+                <a:solidFill>
+                  <a:srgbClr val="F2F0EA"/>
+                </a:solidFill>
+                <a:latin typeface="Arial" pitchFamily="34" charset="0"/>
+                <a:ea typeface="Arial" pitchFamily="34" charset="-122"/>
+                <a:cs typeface="Arial" pitchFamily="34" charset="-120"/>
+              </a:rPr>
+              <a:t>Mensagem</a:t>
+            </a:r>
+            <a:pPr indent="0" marL="0">
+              <a:lnSpc>
+                <a:spcPct val="105000"/>
+              </a:lnSpc>
+              <a:buNone/>
+            </a:pPr>
+            <a:r>
+              <a:rPr lang="en-US" sz="2200" dirty="0">
+                <a:solidFill>
+                  <a:srgbClr val="F2F0EA"/>
+                </a:solidFill>
+                <a:latin typeface="Arial" pitchFamily="34" charset="0"/>
+                <a:ea typeface="Arial" pitchFamily="34" charset="-122"/>
+                <a:cs typeface="Arial" pitchFamily="34" charset="-120"/>
+              </a:rPr>
+              <a:t>: um regresso que destrói e um que se espera.</a:t>
             </a:r>
             <a:endParaRPr lang="en-US" sz="2200" dirty="0"/>
           </a:p>
@@ -3294,6 +3362,20 @@
               <a:buNone/>
             </a:pPr>
             <a:r>
+              <a:rPr lang="en-US" sz="1200" i="1" dirty="0">
+                <a:solidFill>
+                  <a:srgbClr val="A9A79F"/>
+                </a:solidFill>
+                <a:latin typeface="Arial" pitchFamily="34" charset="0"/>
+                <a:ea typeface="Arial" pitchFamily="34" charset="-122"/>
+                <a:cs typeface="Arial" pitchFamily="34" charset="-120"/>
+              </a:rPr>
+              <a:t>Mensagem</a:t>
+            </a:r>
+            <a:pPr indent="0" marL="0">
+              <a:buNone/>
+            </a:pPr>
+            <a:r>
               <a:rPr lang="en-US" sz="1200" dirty="0">
                 <a:solidFill>
                   <a:srgbClr val="A9A79F"/>
@@ -3302,7 +3384,7 @@
                 <a:ea typeface="Arial" pitchFamily="34" charset="-122"/>
                 <a:cs typeface="Arial" pitchFamily="34" charset="-120"/>
               </a:rPr>
-              <a:t>Mensagem (20-2-1933), Arquivo Pessoa</a:t>
+              <a:t> (20-2-1933), Arquivo Pessoa</a:t>
             </a:r>
             <a:endParaRPr lang="en-US" sz="1200" dirty="0"/>
           </a:p>
@@ -3694,6 +3776,20 @@
               <a:buNone/>
             </a:pPr>
             <a:r>
+              <a:rPr lang="en-US" sz="1200" i="1" dirty="0">
+                <a:solidFill>
+                  <a:srgbClr val="A9A79F"/>
+                </a:solidFill>
+                <a:latin typeface="Arial" pitchFamily="34" charset="0"/>
+                <a:ea typeface="Arial" pitchFamily="34" charset="-122"/>
+                <a:cs typeface="Arial" pitchFamily="34" charset="-120"/>
+              </a:rPr>
+              <a:t>Mensagem</a:t>
+            </a:r>
+            <a:pPr indent="0" marL="0">
+              <a:buNone/>
+            </a:pPr>
+            <a:r>
               <a:rPr lang="en-US" sz="1200" dirty="0">
                 <a:solidFill>
                   <a:srgbClr val="A9A79F"/>
@@ -3702,7 +3798,7 @@
                 <a:ea typeface="Arial" pitchFamily="34" charset="-122"/>
                 <a:cs typeface="Arial" pitchFamily="34" charset="-120"/>
               </a:rPr>
-              <a:t>Mensagem (20-2-1933), Arquivo Pessoa</a:t>
+              <a:t> (20-2-1933), Arquivo Pessoa</a:t>
             </a:r>
             <a:endParaRPr lang="en-US" sz="1200" dirty="0"/>
           </a:p>
@@ -4334,6 +4430,20 @@
               <a:buNone/>
             </a:pPr>
             <a:r>
+              <a:rPr lang="en-US" sz="1200" i="1" dirty="0">
+                <a:solidFill>
+                  <a:srgbClr val="A9A79F"/>
+                </a:solidFill>
+                <a:latin typeface="Arial" pitchFamily="34" charset="0"/>
+                <a:ea typeface="Arial" pitchFamily="34" charset="-122"/>
+                <a:cs typeface="Arial" pitchFamily="34" charset="-120"/>
+              </a:rPr>
+              <a:t>Mensagem</a:t>
+            </a:r>
+            <a:pPr indent="0" marL="0">
+              <a:buNone/>
+            </a:pPr>
+            <a:r>
               <a:rPr lang="en-US" sz="1200" dirty="0">
                 <a:solidFill>
                   <a:srgbClr val="A9A79F"/>
@@ -4342,7 +4452,7 @@
                 <a:ea typeface="Arial" pitchFamily="34" charset="-122"/>
                 <a:cs typeface="Arial" pitchFamily="34" charset="-120"/>
               </a:rPr>
-              <a:t>Mensagem, III. O Encoberto (10-12-1928), Arquivo Pessoa</a:t>
+              <a:t>, III. «O Encoberto» (10-12-1928), Arquivo Pessoa</a:t>
             </a:r>
             <a:endParaRPr lang="en-US" sz="1200" dirty="0"/>
           </a:p>
@@ -4965,7 +5075,41 @@
                 <a:ea typeface="Arial" pitchFamily="34" charset="-122"/>
                 <a:cs typeface="Arial" pitchFamily="34" charset="-120"/>
               </a:rPr>
-              <a:t>A mesma espera aparece em Frei Luís de Sousa, que leste no 2.º ano: lá era tragédia, aqui é mito.</a:t>
+              <a:t>A mesma espera aparece em </a:t>
+            </a:r>
+            <a:pPr indent="0" marL="0">
+              <a:lnSpc>
+                <a:spcPct val="105000"/>
+              </a:lnSpc>
+              <a:buNone/>
+            </a:pPr>
+            <a:r>
+              <a:rPr lang="en-US" sz="2200" i="1" dirty="0">
+                <a:solidFill>
+                  <a:srgbClr val="F2F0EA"/>
+                </a:solidFill>
+                <a:latin typeface="Arial" pitchFamily="34" charset="0"/>
+                <a:ea typeface="Arial" pitchFamily="34" charset="-122"/>
+                <a:cs typeface="Arial" pitchFamily="34" charset="-120"/>
+              </a:rPr>
+              <a:t>Frei Luís de Sousa</a:t>
+            </a:r>
+            <a:pPr indent="0" marL="0">
+              <a:lnSpc>
+                <a:spcPct val="105000"/>
+              </a:lnSpc>
+              <a:buNone/>
+            </a:pPr>
+            <a:r>
+              <a:rPr lang="en-US" sz="2200" dirty="0">
+                <a:solidFill>
+                  <a:srgbClr val="F2F0EA"/>
+                </a:solidFill>
+                <a:latin typeface="Arial" pitchFamily="34" charset="0"/>
+                <a:ea typeface="Arial" pitchFamily="34" charset="-122"/>
+                <a:cs typeface="Arial" pitchFamily="34" charset="-120"/>
+              </a:rPr>
+              <a:t>, que leste no 2.º ano: lá era tragédia, aqui é mito.</a:t>
             </a:r>
             <a:endParaRPr lang="en-US" sz="2200" dirty="0"/>
           </a:p>
@@ -5277,7 +5421,7 @@
               <a:buNone/>
             </a:pPr>
             <a:r>
-              <a:rPr lang="en-US" sz="2700" dirty="0">
+              <a:rPr lang="en-US" sz="2300" dirty="0">
                 <a:solidFill>
                   <a:srgbClr val="F2F0EA"/>
                 </a:solidFill>
@@ -5285,9 +5429,77 @@
                 <a:ea typeface="Georgia" pitchFamily="34" charset="-122"/>
                 <a:cs typeface="Georgia" pitchFamily="34" charset="-120"/>
               </a:rPr>
-              <a:t>A batalha de Alcácer Quibir, onde D. Sebastião desapareceu, foi no Norte de África. Em Frei Luís de Sousa, que leste no 2.º ano, é dessa batalha que regressa D. João de Portugal.</a:t>
-            </a:r>
-            <a:endParaRPr lang="en-US" sz="2700" dirty="0"/>
+              <a:t>A batalha de </a:t>
+            </a:r>
+            <a:pPr indent="0" marL="0">
+              <a:lnSpc>
+                <a:spcPct val="120000"/>
+              </a:lnSpc>
+              <a:buNone/>
+            </a:pPr>
+            <a:r>
+              <a:rPr lang="en-US" sz="2300" b="1" dirty="0">
+                <a:solidFill>
+                  <a:srgbClr val="F2F0EA"/>
+                </a:solidFill>
+                <a:latin typeface="Georgia" pitchFamily="34" charset="0"/>
+                <a:ea typeface="Georgia" pitchFamily="34" charset="-122"/>
+                <a:cs typeface="Georgia" pitchFamily="34" charset="-120"/>
+              </a:rPr>
+              <a:t>Alcácer Quibir</a:t>
+            </a:r>
+            <a:pPr indent="0" marL="0">
+              <a:lnSpc>
+                <a:spcPct val="120000"/>
+              </a:lnSpc>
+              <a:buNone/>
+            </a:pPr>
+            <a:r>
+              <a:rPr lang="en-US" sz="2300" dirty="0">
+                <a:solidFill>
+                  <a:srgbClr val="F2F0EA"/>
+                </a:solidFill>
+                <a:latin typeface="Georgia" pitchFamily="34" charset="0"/>
+                <a:ea typeface="Georgia" pitchFamily="34" charset="-122"/>
+                <a:cs typeface="Georgia" pitchFamily="34" charset="-120"/>
+              </a:rPr>
+              <a:t>, onde D. Sebastião desapareceu, foi no Norte de África. Em </a:t>
+            </a:r>
+            <a:pPr indent="0" marL="0">
+              <a:lnSpc>
+                <a:spcPct val="120000"/>
+              </a:lnSpc>
+              <a:buNone/>
+            </a:pPr>
+            <a:r>
+              <a:rPr lang="en-US" sz="2300" i="1" dirty="0">
+                <a:solidFill>
+                  <a:srgbClr val="F2F0EA"/>
+                </a:solidFill>
+                <a:latin typeface="Georgia" pitchFamily="34" charset="0"/>
+                <a:ea typeface="Georgia" pitchFamily="34" charset="-122"/>
+                <a:cs typeface="Georgia" pitchFamily="34" charset="-120"/>
+              </a:rPr>
+              <a:t>Frei Luís de Sousa</a:t>
+            </a:r>
+            <a:pPr indent="0" marL="0">
+              <a:lnSpc>
+                <a:spcPct val="120000"/>
+              </a:lnSpc>
+              <a:buNone/>
+            </a:pPr>
+            <a:r>
+              <a:rPr lang="en-US" sz="2300" dirty="0">
+                <a:solidFill>
+                  <a:srgbClr val="F2F0EA"/>
+                </a:solidFill>
+                <a:latin typeface="Georgia" pitchFamily="34" charset="0"/>
+                <a:ea typeface="Georgia" pitchFamily="34" charset="-122"/>
+                <a:cs typeface="Georgia" pitchFamily="34" charset="-120"/>
+              </a:rPr>
+              <a:t>, que leste no 2.º ano, é dessa batalha que regressa D. João de Portugal.</a:t>
+            </a:r>
+            <a:endParaRPr lang="en-US" sz="2300" dirty="0"/>
           </a:p>
         </p:txBody>
       </p:sp>
